--- a/09.문서/TeamProject/V1.0_화면설계서 양식.pptx
+++ b/09.문서/TeamProject/V1.0_화면설계서 양식.pptx
@@ -185,6 +185,189 @@
 <file path=ppt/changesInfos/changesInfo1.xml><?xml version="1.0" encoding="utf-8"?>
 <pc:chgInfo xmlns:a="http://schemas.openxmlformats.org/drawingml/2006/main" xmlns:r="http://schemas.openxmlformats.org/officeDocument/2006/relationships" xmlns:ac="http://schemas.microsoft.com/office/drawing/2013/main/command" xmlns:pc="http://schemas.microsoft.com/office/powerpoint/2013/main/command">
   <pc:docChgLst>
+    <pc:chgData name="CHOI JUNHO" userId="2ed797a4709b55ca" providerId="LiveId" clId="{5B745F2D-BA38-4651-B32E-4E733F00C45C}"/>
+    <pc:docChg chg="undo custSel addSld delSld modSld modSection">
+      <pc:chgData name="CHOI JUNHO" userId="2ed797a4709b55ca" providerId="LiveId" clId="{5B745F2D-BA38-4651-B32E-4E733F00C45C}" dt="2019-10-28T05:35:24.932" v="113" actId="47"/>
+      <pc:docMkLst>
+        <pc:docMk/>
+      </pc:docMkLst>
+      <pc:sldChg chg="modSp">
+        <pc:chgData name="CHOI JUNHO" userId="2ed797a4709b55ca" providerId="LiveId" clId="{5B745F2D-BA38-4651-B32E-4E733F00C45C}" dt="2019-10-28T05:31:54.468" v="26"/>
+        <pc:sldMkLst>
+          <pc:docMk/>
+          <pc:sldMk cId="2612761801" sldId="256"/>
+        </pc:sldMkLst>
+        <pc:spChg chg="mod">
+          <ac:chgData name="CHOI JUNHO" userId="2ed797a4709b55ca" providerId="LiveId" clId="{5B745F2D-BA38-4651-B32E-4E733F00C45C}" dt="2019-10-28T05:31:54.468" v="26"/>
+          <ac:spMkLst>
+            <pc:docMk/>
+            <pc:sldMk cId="2612761801" sldId="256"/>
+            <ac:spMk id="2" creationId="{00000000-0000-0000-0000-000000000000}"/>
+          </ac:spMkLst>
+        </pc:spChg>
+      </pc:sldChg>
+      <pc:sldChg chg="modSp">
+        <pc:chgData name="CHOI JUNHO" userId="2ed797a4709b55ca" providerId="LiveId" clId="{5B745F2D-BA38-4651-B32E-4E733F00C45C}" dt="2019-10-28T05:32:00.304" v="28" actId="20577"/>
+        <pc:sldMkLst>
+          <pc:docMk/>
+          <pc:sldMk cId="1580783546" sldId="265"/>
+        </pc:sldMkLst>
+        <pc:graphicFrameChg chg="modGraphic">
+          <ac:chgData name="CHOI JUNHO" userId="2ed797a4709b55ca" providerId="LiveId" clId="{5B745F2D-BA38-4651-B32E-4E733F00C45C}" dt="2019-10-28T05:32:00.304" v="28" actId="20577"/>
+          <ac:graphicFrameMkLst>
+            <pc:docMk/>
+            <pc:sldMk cId="1580783546" sldId="265"/>
+            <ac:graphicFrameMk id="3" creationId="{00000000-0000-0000-0000-000000000000}"/>
+          </ac:graphicFrameMkLst>
+        </pc:graphicFrameChg>
+      </pc:sldChg>
+      <pc:sldChg chg="add del">
+        <pc:chgData name="CHOI JUNHO" userId="2ed797a4709b55ca" providerId="LiveId" clId="{5B745F2D-BA38-4651-B32E-4E733F00C45C}" dt="2019-10-28T05:35:24.932" v="113" actId="47"/>
+        <pc:sldMkLst>
+          <pc:docMk/>
+          <pc:sldMk cId="3701024981" sldId="269"/>
+        </pc:sldMkLst>
+      </pc:sldChg>
+      <pc:sldChg chg="del">
+        <pc:chgData name="CHOI JUNHO" userId="2ed797a4709b55ca" providerId="LiveId" clId="{5B745F2D-BA38-4651-B32E-4E733F00C45C}" dt="2019-10-28T05:35:24.932" v="113" actId="47"/>
+        <pc:sldMkLst>
+          <pc:docMk/>
+          <pc:sldMk cId="1665297153" sldId="270"/>
+        </pc:sldMkLst>
+      </pc:sldChg>
+      <pc:sldChg chg="del">
+        <pc:chgData name="CHOI JUNHO" userId="2ed797a4709b55ca" providerId="LiveId" clId="{5B745F2D-BA38-4651-B32E-4E733F00C45C}" dt="2019-10-28T05:35:24.932" v="113" actId="47"/>
+        <pc:sldMkLst>
+          <pc:docMk/>
+          <pc:sldMk cId="3762929551" sldId="271"/>
+        </pc:sldMkLst>
+      </pc:sldChg>
+      <pc:sldChg chg="del">
+        <pc:chgData name="CHOI JUNHO" userId="2ed797a4709b55ca" providerId="LiveId" clId="{5B745F2D-BA38-4651-B32E-4E733F00C45C}" dt="2019-10-28T05:35:24.932" v="113" actId="47"/>
+        <pc:sldMkLst>
+          <pc:docMk/>
+          <pc:sldMk cId="1819313943" sldId="272"/>
+        </pc:sldMkLst>
+      </pc:sldChg>
+      <pc:sldChg chg="addSp delSp modSp add">
+        <pc:chgData name="CHOI JUNHO" userId="2ed797a4709b55ca" providerId="LiveId" clId="{5B745F2D-BA38-4651-B32E-4E733F00C45C}" dt="2019-10-28T05:32:14.218" v="30"/>
+        <pc:sldMkLst>
+          <pc:docMk/>
+          <pc:sldMk cId="2611690818" sldId="273"/>
+        </pc:sldMkLst>
+        <pc:spChg chg="del">
+          <ac:chgData name="CHOI JUNHO" userId="2ed797a4709b55ca" providerId="LiveId" clId="{5B745F2D-BA38-4651-B32E-4E733F00C45C}" dt="2019-10-28T05:32:14.218" v="30"/>
+          <ac:spMkLst>
+            <pc:docMk/>
+            <pc:sldMk cId="2611690818" sldId="273"/>
+            <ac:spMk id="2" creationId="{1F44A32E-7DE1-4597-97C7-D51D77B4B919}"/>
+          </ac:spMkLst>
+        </pc:spChg>
+        <pc:spChg chg="add mod">
+          <ac:chgData name="CHOI JUNHO" userId="2ed797a4709b55ca" providerId="LiveId" clId="{5B745F2D-BA38-4651-B32E-4E733F00C45C}" dt="2019-10-28T05:32:14.218" v="30"/>
+          <ac:spMkLst>
+            <pc:docMk/>
+            <pc:sldMk cId="2611690818" sldId="273"/>
+            <ac:spMk id="3" creationId="{683ED0D4-343F-4AC4-936C-4771ADDE3DEC}"/>
+          </ac:spMkLst>
+        </pc:spChg>
+        <pc:spChg chg="add mod">
+          <ac:chgData name="CHOI JUNHO" userId="2ed797a4709b55ca" providerId="LiveId" clId="{5B745F2D-BA38-4651-B32E-4E733F00C45C}" dt="2019-10-28T05:32:14.218" v="30"/>
+          <ac:spMkLst>
+            <pc:docMk/>
+            <pc:sldMk cId="2611690818" sldId="273"/>
+            <ac:spMk id="4" creationId="{566248F4-75FF-4781-B7FF-A6FE901E2D68}"/>
+          </ac:spMkLst>
+        </pc:spChg>
+      </pc:sldChg>
+      <pc:sldChg chg="addSp delSp modSp add">
+        <pc:chgData name="CHOI JUNHO" userId="2ed797a4709b55ca" providerId="LiveId" clId="{5B745F2D-BA38-4651-B32E-4E733F00C45C}" dt="2019-10-28T05:33:58.322" v="69" actId="20577"/>
+        <pc:sldMkLst>
+          <pc:docMk/>
+          <pc:sldMk cId="3759879480" sldId="274"/>
+        </pc:sldMkLst>
+        <pc:spChg chg="del">
+          <ac:chgData name="CHOI JUNHO" userId="2ed797a4709b55ca" providerId="LiveId" clId="{5B745F2D-BA38-4651-B32E-4E733F00C45C}" dt="2019-10-28T05:32:19.407" v="32"/>
+          <ac:spMkLst>
+            <pc:docMk/>
+            <pc:sldMk cId="3759879480" sldId="274"/>
+            <ac:spMk id="2" creationId="{C4ED3712-2DC9-40C5-8E00-41249F7E522D}"/>
+          </ac:spMkLst>
+        </pc:spChg>
+        <pc:spChg chg="del">
+          <ac:chgData name="CHOI JUNHO" userId="2ed797a4709b55ca" providerId="LiveId" clId="{5B745F2D-BA38-4651-B32E-4E733F00C45C}" dt="2019-10-28T05:32:19.407" v="32"/>
+          <ac:spMkLst>
+            <pc:docMk/>
+            <pc:sldMk cId="3759879480" sldId="274"/>
+            <ac:spMk id="3" creationId="{B70C63A2-603E-49D4-A0E9-470EDB93C49A}"/>
+          </ac:spMkLst>
+        </pc:spChg>
+        <pc:spChg chg="add mod">
+          <ac:chgData name="CHOI JUNHO" userId="2ed797a4709b55ca" providerId="LiveId" clId="{5B745F2D-BA38-4651-B32E-4E733F00C45C}" dt="2019-10-28T05:32:19.407" v="32"/>
+          <ac:spMkLst>
+            <pc:docMk/>
+            <pc:sldMk cId="3759879480" sldId="274"/>
+            <ac:spMk id="4" creationId="{32E285E0-25D1-4806-B9DF-3590BD92D435}"/>
+          </ac:spMkLst>
+        </pc:spChg>
+        <pc:spChg chg="add mod">
+          <ac:chgData name="CHOI JUNHO" userId="2ed797a4709b55ca" providerId="LiveId" clId="{5B745F2D-BA38-4651-B32E-4E733F00C45C}" dt="2019-10-28T05:32:19.407" v="32"/>
+          <ac:spMkLst>
+            <pc:docMk/>
+            <pc:sldMk cId="3759879480" sldId="274"/>
+            <ac:spMk id="5" creationId="{181CE6EC-43A5-4409-9C12-1C3782E8CB22}"/>
+          </ac:spMkLst>
+        </pc:spChg>
+        <pc:spChg chg="add mod">
+          <ac:chgData name="CHOI JUNHO" userId="2ed797a4709b55ca" providerId="LiveId" clId="{5B745F2D-BA38-4651-B32E-4E733F00C45C}" dt="2019-10-28T05:32:19.407" v="32"/>
+          <ac:spMkLst>
+            <pc:docMk/>
+            <pc:sldMk cId="3759879480" sldId="274"/>
+            <ac:spMk id="6" creationId="{2CAC9F9F-8442-4289-A3DA-F53C3C82C324}"/>
+          </ac:spMkLst>
+        </pc:spChg>
+        <pc:graphicFrameChg chg="add mod modGraphic">
+          <ac:chgData name="CHOI JUNHO" userId="2ed797a4709b55ca" providerId="LiveId" clId="{5B745F2D-BA38-4651-B32E-4E733F00C45C}" dt="2019-10-28T05:33:58.322" v="69" actId="20577"/>
+          <ac:graphicFrameMkLst>
+            <pc:docMk/>
+            <pc:sldMk cId="3759879480" sldId="274"/>
+            <ac:graphicFrameMk id="7" creationId="{EE672C9C-2796-4CD4-B138-FB14ECB9EFA6}"/>
+          </ac:graphicFrameMkLst>
+        </pc:graphicFrameChg>
+      </pc:sldChg>
+      <pc:sldChg chg="modSp add">
+        <pc:chgData name="CHOI JUNHO" userId="2ed797a4709b55ca" providerId="LiveId" clId="{5B745F2D-BA38-4651-B32E-4E733F00C45C}" dt="2019-10-28T05:34:28.532" v="85" actId="20577"/>
+        <pc:sldMkLst>
+          <pc:docMk/>
+          <pc:sldMk cId="2688285372" sldId="275"/>
+        </pc:sldMkLst>
+        <pc:spChg chg="mod">
+          <ac:chgData name="CHOI JUNHO" userId="2ed797a4709b55ca" providerId="LiveId" clId="{5B745F2D-BA38-4651-B32E-4E733F00C45C}" dt="2019-10-28T05:34:28.532" v="85" actId="20577"/>
+          <ac:spMkLst>
+            <pc:docMk/>
+            <pc:sldMk cId="2688285372" sldId="275"/>
+            <ac:spMk id="2" creationId="{719F2D03-4DCC-42DA-95ED-B3FF360D7F63}"/>
+          </ac:spMkLst>
+        </pc:spChg>
+      </pc:sldChg>
+      <pc:sldChg chg="modSp add">
+        <pc:chgData name="CHOI JUNHO" userId="2ed797a4709b55ca" providerId="LiveId" clId="{5B745F2D-BA38-4651-B32E-4E733F00C45C}" dt="2019-10-28T05:34:49.385" v="110"/>
+        <pc:sldMkLst>
+          <pc:docMk/>
+          <pc:sldMk cId="3982823181" sldId="276"/>
+        </pc:sldMkLst>
+        <pc:spChg chg="mod">
+          <ac:chgData name="CHOI JUNHO" userId="2ed797a4709b55ca" providerId="LiveId" clId="{5B745F2D-BA38-4651-B32E-4E733F00C45C}" dt="2019-10-28T05:34:49.385" v="110"/>
+          <ac:spMkLst>
+            <pc:docMk/>
+            <pc:sldMk cId="3982823181" sldId="276"/>
+            <ac:spMk id="2" creationId="{84FE7BD8-CFC6-4079-BAE3-BDDFC826F1C7}"/>
+          </ac:spMkLst>
+        </pc:spChg>
+      </pc:sldChg>
+    </pc:docChg>
+  </pc:docChgLst>
+  <pc:docChgLst>
     <pc:chgData name="CHOI JUNHO" userId="2ed797a4709b55ca" providerId="LiveId" clId="{5B9CC2E5-527B-4B3B-BD11-698718A29A94}"/>
     <pc:docChg chg="undo redo custSel addSld delSld modSld sldOrd modMainMaster modSection">
       <pc:chgData name="CHOI JUNHO" userId="2ed797a4709b55ca" providerId="LiveId" clId="{5B9CC2E5-527B-4B3B-BD11-698718A29A94}" dt="2019-10-28T03:27:06.874" v="5463" actId="20577"/>
@@ -3793,189 +3976,6 @@
           </pc:spChg>
         </pc:sldLayoutChg>
       </pc:sldMasterChg>
-    </pc:docChg>
-  </pc:docChgLst>
-  <pc:docChgLst>
-    <pc:chgData name="CHOI JUNHO" userId="2ed797a4709b55ca" providerId="LiveId" clId="{5B745F2D-BA38-4651-B32E-4E733F00C45C}"/>
-    <pc:docChg chg="undo custSel addSld delSld modSld modSection">
-      <pc:chgData name="CHOI JUNHO" userId="2ed797a4709b55ca" providerId="LiveId" clId="{5B745F2D-BA38-4651-B32E-4E733F00C45C}" dt="2019-10-28T05:35:24.932" v="113" actId="47"/>
-      <pc:docMkLst>
-        <pc:docMk/>
-      </pc:docMkLst>
-      <pc:sldChg chg="modSp">
-        <pc:chgData name="CHOI JUNHO" userId="2ed797a4709b55ca" providerId="LiveId" clId="{5B745F2D-BA38-4651-B32E-4E733F00C45C}" dt="2019-10-28T05:31:54.468" v="26"/>
-        <pc:sldMkLst>
-          <pc:docMk/>
-          <pc:sldMk cId="2612761801" sldId="256"/>
-        </pc:sldMkLst>
-        <pc:spChg chg="mod">
-          <ac:chgData name="CHOI JUNHO" userId="2ed797a4709b55ca" providerId="LiveId" clId="{5B745F2D-BA38-4651-B32E-4E733F00C45C}" dt="2019-10-28T05:31:54.468" v="26"/>
-          <ac:spMkLst>
-            <pc:docMk/>
-            <pc:sldMk cId="2612761801" sldId="256"/>
-            <ac:spMk id="2" creationId="{00000000-0000-0000-0000-000000000000}"/>
-          </ac:spMkLst>
-        </pc:spChg>
-      </pc:sldChg>
-      <pc:sldChg chg="modSp">
-        <pc:chgData name="CHOI JUNHO" userId="2ed797a4709b55ca" providerId="LiveId" clId="{5B745F2D-BA38-4651-B32E-4E733F00C45C}" dt="2019-10-28T05:32:00.304" v="28" actId="20577"/>
-        <pc:sldMkLst>
-          <pc:docMk/>
-          <pc:sldMk cId="1580783546" sldId="265"/>
-        </pc:sldMkLst>
-        <pc:graphicFrameChg chg="modGraphic">
-          <ac:chgData name="CHOI JUNHO" userId="2ed797a4709b55ca" providerId="LiveId" clId="{5B745F2D-BA38-4651-B32E-4E733F00C45C}" dt="2019-10-28T05:32:00.304" v="28" actId="20577"/>
-          <ac:graphicFrameMkLst>
-            <pc:docMk/>
-            <pc:sldMk cId="1580783546" sldId="265"/>
-            <ac:graphicFrameMk id="3" creationId="{00000000-0000-0000-0000-000000000000}"/>
-          </ac:graphicFrameMkLst>
-        </pc:graphicFrameChg>
-      </pc:sldChg>
-      <pc:sldChg chg="add del">
-        <pc:chgData name="CHOI JUNHO" userId="2ed797a4709b55ca" providerId="LiveId" clId="{5B745F2D-BA38-4651-B32E-4E733F00C45C}" dt="2019-10-28T05:35:24.932" v="113" actId="47"/>
-        <pc:sldMkLst>
-          <pc:docMk/>
-          <pc:sldMk cId="3701024981" sldId="269"/>
-        </pc:sldMkLst>
-      </pc:sldChg>
-      <pc:sldChg chg="del">
-        <pc:chgData name="CHOI JUNHO" userId="2ed797a4709b55ca" providerId="LiveId" clId="{5B745F2D-BA38-4651-B32E-4E733F00C45C}" dt="2019-10-28T05:35:24.932" v="113" actId="47"/>
-        <pc:sldMkLst>
-          <pc:docMk/>
-          <pc:sldMk cId="1665297153" sldId="270"/>
-        </pc:sldMkLst>
-      </pc:sldChg>
-      <pc:sldChg chg="del">
-        <pc:chgData name="CHOI JUNHO" userId="2ed797a4709b55ca" providerId="LiveId" clId="{5B745F2D-BA38-4651-B32E-4E733F00C45C}" dt="2019-10-28T05:35:24.932" v="113" actId="47"/>
-        <pc:sldMkLst>
-          <pc:docMk/>
-          <pc:sldMk cId="3762929551" sldId="271"/>
-        </pc:sldMkLst>
-      </pc:sldChg>
-      <pc:sldChg chg="del">
-        <pc:chgData name="CHOI JUNHO" userId="2ed797a4709b55ca" providerId="LiveId" clId="{5B745F2D-BA38-4651-B32E-4E733F00C45C}" dt="2019-10-28T05:35:24.932" v="113" actId="47"/>
-        <pc:sldMkLst>
-          <pc:docMk/>
-          <pc:sldMk cId="1819313943" sldId="272"/>
-        </pc:sldMkLst>
-      </pc:sldChg>
-      <pc:sldChg chg="addSp delSp modSp add">
-        <pc:chgData name="CHOI JUNHO" userId="2ed797a4709b55ca" providerId="LiveId" clId="{5B745F2D-BA38-4651-B32E-4E733F00C45C}" dt="2019-10-28T05:32:14.218" v="30"/>
-        <pc:sldMkLst>
-          <pc:docMk/>
-          <pc:sldMk cId="2611690818" sldId="273"/>
-        </pc:sldMkLst>
-        <pc:spChg chg="del">
-          <ac:chgData name="CHOI JUNHO" userId="2ed797a4709b55ca" providerId="LiveId" clId="{5B745F2D-BA38-4651-B32E-4E733F00C45C}" dt="2019-10-28T05:32:14.218" v="30"/>
-          <ac:spMkLst>
-            <pc:docMk/>
-            <pc:sldMk cId="2611690818" sldId="273"/>
-            <ac:spMk id="2" creationId="{1F44A32E-7DE1-4597-97C7-D51D77B4B919}"/>
-          </ac:spMkLst>
-        </pc:spChg>
-        <pc:spChg chg="add mod">
-          <ac:chgData name="CHOI JUNHO" userId="2ed797a4709b55ca" providerId="LiveId" clId="{5B745F2D-BA38-4651-B32E-4E733F00C45C}" dt="2019-10-28T05:32:14.218" v="30"/>
-          <ac:spMkLst>
-            <pc:docMk/>
-            <pc:sldMk cId="2611690818" sldId="273"/>
-            <ac:spMk id="3" creationId="{683ED0D4-343F-4AC4-936C-4771ADDE3DEC}"/>
-          </ac:spMkLst>
-        </pc:spChg>
-        <pc:spChg chg="add mod">
-          <ac:chgData name="CHOI JUNHO" userId="2ed797a4709b55ca" providerId="LiveId" clId="{5B745F2D-BA38-4651-B32E-4E733F00C45C}" dt="2019-10-28T05:32:14.218" v="30"/>
-          <ac:spMkLst>
-            <pc:docMk/>
-            <pc:sldMk cId="2611690818" sldId="273"/>
-            <ac:spMk id="4" creationId="{566248F4-75FF-4781-B7FF-A6FE901E2D68}"/>
-          </ac:spMkLst>
-        </pc:spChg>
-      </pc:sldChg>
-      <pc:sldChg chg="addSp delSp modSp add">
-        <pc:chgData name="CHOI JUNHO" userId="2ed797a4709b55ca" providerId="LiveId" clId="{5B745F2D-BA38-4651-B32E-4E733F00C45C}" dt="2019-10-28T05:33:58.322" v="69" actId="20577"/>
-        <pc:sldMkLst>
-          <pc:docMk/>
-          <pc:sldMk cId="3759879480" sldId="274"/>
-        </pc:sldMkLst>
-        <pc:spChg chg="del">
-          <ac:chgData name="CHOI JUNHO" userId="2ed797a4709b55ca" providerId="LiveId" clId="{5B745F2D-BA38-4651-B32E-4E733F00C45C}" dt="2019-10-28T05:32:19.407" v="32"/>
-          <ac:spMkLst>
-            <pc:docMk/>
-            <pc:sldMk cId="3759879480" sldId="274"/>
-            <ac:spMk id="2" creationId="{C4ED3712-2DC9-40C5-8E00-41249F7E522D}"/>
-          </ac:spMkLst>
-        </pc:spChg>
-        <pc:spChg chg="del">
-          <ac:chgData name="CHOI JUNHO" userId="2ed797a4709b55ca" providerId="LiveId" clId="{5B745F2D-BA38-4651-B32E-4E733F00C45C}" dt="2019-10-28T05:32:19.407" v="32"/>
-          <ac:spMkLst>
-            <pc:docMk/>
-            <pc:sldMk cId="3759879480" sldId="274"/>
-            <ac:spMk id="3" creationId="{B70C63A2-603E-49D4-A0E9-470EDB93C49A}"/>
-          </ac:spMkLst>
-        </pc:spChg>
-        <pc:spChg chg="add mod">
-          <ac:chgData name="CHOI JUNHO" userId="2ed797a4709b55ca" providerId="LiveId" clId="{5B745F2D-BA38-4651-B32E-4E733F00C45C}" dt="2019-10-28T05:32:19.407" v="32"/>
-          <ac:spMkLst>
-            <pc:docMk/>
-            <pc:sldMk cId="3759879480" sldId="274"/>
-            <ac:spMk id="4" creationId="{32E285E0-25D1-4806-B9DF-3590BD92D435}"/>
-          </ac:spMkLst>
-        </pc:spChg>
-        <pc:spChg chg="add mod">
-          <ac:chgData name="CHOI JUNHO" userId="2ed797a4709b55ca" providerId="LiveId" clId="{5B745F2D-BA38-4651-B32E-4E733F00C45C}" dt="2019-10-28T05:32:19.407" v="32"/>
-          <ac:spMkLst>
-            <pc:docMk/>
-            <pc:sldMk cId="3759879480" sldId="274"/>
-            <ac:spMk id="5" creationId="{181CE6EC-43A5-4409-9C12-1C3782E8CB22}"/>
-          </ac:spMkLst>
-        </pc:spChg>
-        <pc:spChg chg="add mod">
-          <ac:chgData name="CHOI JUNHO" userId="2ed797a4709b55ca" providerId="LiveId" clId="{5B745F2D-BA38-4651-B32E-4E733F00C45C}" dt="2019-10-28T05:32:19.407" v="32"/>
-          <ac:spMkLst>
-            <pc:docMk/>
-            <pc:sldMk cId="3759879480" sldId="274"/>
-            <ac:spMk id="6" creationId="{2CAC9F9F-8442-4289-A3DA-F53C3C82C324}"/>
-          </ac:spMkLst>
-        </pc:spChg>
-        <pc:graphicFrameChg chg="add mod modGraphic">
-          <ac:chgData name="CHOI JUNHO" userId="2ed797a4709b55ca" providerId="LiveId" clId="{5B745F2D-BA38-4651-B32E-4E733F00C45C}" dt="2019-10-28T05:33:58.322" v="69" actId="20577"/>
-          <ac:graphicFrameMkLst>
-            <pc:docMk/>
-            <pc:sldMk cId="3759879480" sldId="274"/>
-            <ac:graphicFrameMk id="7" creationId="{EE672C9C-2796-4CD4-B138-FB14ECB9EFA6}"/>
-          </ac:graphicFrameMkLst>
-        </pc:graphicFrameChg>
-      </pc:sldChg>
-      <pc:sldChg chg="modSp add">
-        <pc:chgData name="CHOI JUNHO" userId="2ed797a4709b55ca" providerId="LiveId" clId="{5B745F2D-BA38-4651-B32E-4E733F00C45C}" dt="2019-10-28T05:34:28.532" v="85" actId="20577"/>
-        <pc:sldMkLst>
-          <pc:docMk/>
-          <pc:sldMk cId="2688285372" sldId="275"/>
-        </pc:sldMkLst>
-        <pc:spChg chg="mod">
-          <ac:chgData name="CHOI JUNHO" userId="2ed797a4709b55ca" providerId="LiveId" clId="{5B745F2D-BA38-4651-B32E-4E733F00C45C}" dt="2019-10-28T05:34:28.532" v="85" actId="20577"/>
-          <ac:spMkLst>
-            <pc:docMk/>
-            <pc:sldMk cId="2688285372" sldId="275"/>
-            <ac:spMk id="2" creationId="{719F2D03-4DCC-42DA-95ED-B3FF360D7F63}"/>
-          </ac:spMkLst>
-        </pc:spChg>
-      </pc:sldChg>
-      <pc:sldChg chg="modSp add">
-        <pc:chgData name="CHOI JUNHO" userId="2ed797a4709b55ca" providerId="LiveId" clId="{5B745F2D-BA38-4651-B32E-4E733F00C45C}" dt="2019-10-28T05:34:49.385" v="110"/>
-        <pc:sldMkLst>
-          <pc:docMk/>
-          <pc:sldMk cId="3982823181" sldId="276"/>
-        </pc:sldMkLst>
-        <pc:spChg chg="mod">
-          <ac:chgData name="CHOI JUNHO" userId="2ed797a4709b55ca" providerId="LiveId" clId="{5B745F2D-BA38-4651-B32E-4E733F00C45C}" dt="2019-10-28T05:34:49.385" v="110"/>
-          <ac:spMkLst>
-            <pc:docMk/>
-            <pc:sldMk cId="3982823181" sldId="276"/>
-            <ac:spMk id="2" creationId="{84FE7BD8-CFC6-4079-BAE3-BDDFC826F1C7}"/>
-          </ac:spMkLst>
-        </pc:spChg>
-      </pc:sldChg>
     </pc:docChg>
   </pc:docChgLst>
 </pc:chgInfo>
@@ -4163,7 +4163,7 @@
           <a:p>
             <a:fld id="{98FBB39A-9110-43FD-8DF2-684D1523A0BC}" type="datetime1">
               <a:rPr lang="ko-KR" altLang="en-US" smtClean="0"/>
-              <a:t>2026-01-08</a:t>
+              <a:t>2019-12-28 (Sat)</a:t>
             </a:fld>
             <a:endParaRPr lang="ko-KR" altLang="en-US"/>
           </a:p>
@@ -5183,7 +5183,7 @@
           </a:ln>
           <a:extLst>
             <a:ext uri="{C572A759-6A51-4108-AA02-DFA0A04FC94B}">
-              <ma14:wrappingTextBoxFlag xmlns="" xmlns:m="http://schemas.openxmlformats.org/officeDocument/2006/math" xmlns:a14="http://schemas.microsoft.com/office/drawing/2010/main" xmlns:ma14="http://schemas.microsoft.com/office/mac/drawingml/2011/main" val="1"/>
+              <ma14:wrappingTextBoxFlag xmlns:ma14="http://schemas.microsoft.com/office/mac/drawingml/2011/main" xmlns:a14="http://schemas.microsoft.com/office/drawing/2010/main" xmlns:m="http://schemas.openxmlformats.org/officeDocument/2006/math" xmlns="" val="1"/>
             </a:ext>
           </a:extLst>
         </p:spPr>
@@ -5286,7 +5286,7 @@
           </a:ln>
           <a:extLst>
             <a:ext uri="{C572A759-6A51-4108-AA02-DFA0A04FC94B}">
-              <ma14:wrappingTextBoxFlag xmlns="" xmlns:m="http://schemas.openxmlformats.org/officeDocument/2006/math" xmlns:a14="http://schemas.microsoft.com/office/drawing/2010/main" xmlns:ma14="http://schemas.microsoft.com/office/mac/drawingml/2011/main" val="1"/>
+              <ma14:wrappingTextBoxFlag xmlns:ma14="http://schemas.microsoft.com/office/mac/drawingml/2011/main" xmlns:a14="http://schemas.microsoft.com/office/drawing/2010/main" xmlns:m="http://schemas.openxmlformats.org/officeDocument/2006/math" xmlns="" val="1"/>
             </a:ext>
           </a:extLst>
         </p:spPr>
@@ -5388,7 +5388,7 @@
           </a:ln>
           <a:extLst>
             <a:ext uri="{C572A759-6A51-4108-AA02-DFA0A04FC94B}">
-              <ma14:wrappingTextBoxFlag xmlns="" xmlns:m="http://schemas.openxmlformats.org/officeDocument/2006/math" xmlns:a14="http://schemas.microsoft.com/office/drawing/2010/main" xmlns:ma14="http://schemas.microsoft.com/office/mac/drawingml/2011/main" val="1"/>
+              <ma14:wrappingTextBoxFlag xmlns:ma14="http://schemas.microsoft.com/office/mac/drawingml/2011/main" xmlns:a14="http://schemas.microsoft.com/office/drawing/2010/main" xmlns:m="http://schemas.openxmlformats.org/officeDocument/2006/math" xmlns="" val="1"/>
             </a:ext>
           </a:extLst>
         </p:spPr>
@@ -7153,7 +7153,7 @@
           <p:nvPr>
             <p:extLst>
               <p:ext uri="{D42A27DB-BD31-4B8C-83A1-F6EECF244321}">
-                <p14:modId xmlns:p14="http://schemas.microsoft.com/office/powerpoint/2010/main" val="2419059163"/>
+                <p14:modId xmlns:p14="http://schemas.microsoft.com/office/powerpoint/2010/main" val="2970646287"/>
               </p:ext>
             </p:extLst>
           </p:nvPr>
@@ -8067,14 +8067,6 @@
                         <a:tabLst/>
                         <a:defRPr/>
                       </a:pPr>
-                      <a:r>
-                        <a:rPr lang="en-US" altLang="ko-KR" sz="900" dirty="0">
-                          <a:solidFill>
-                            <a:schemeClr val="tx1"/>
-                          </a:solidFill>
-                        </a:rPr>
-                        <a:t>https://yamestyle.com/431</a:t>
-                      </a:r>
                       <a:endParaRPr lang="ko-KR" altLang="en-US" sz="900" dirty="0">
                         <a:solidFill>
                           <a:schemeClr val="tx1"/>
@@ -35805,7 +35797,7 @@
           <p:nvPr/>
         </p:nvPicPr>
         <p:blipFill rotWithShape="1">
-          <a:blip r:embed="rId2" cstate="print">
+          <a:blip r:embed="rId2">
             <a:extLst>
               <a:ext uri="{28A0092B-C50C-407E-A947-70E740481C1C}">
                 <a14:useLocalDpi xmlns:a14="http://schemas.microsoft.com/office/drawing/2010/main" val="0"/>
@@ -36754,7 +36746,7 @@
             <p:nvPr/>
           </p:nvPicPr>
           <p:blipFill>
-            <a:blip r:embed="rId3" cstate="print">
+            <a:blip r:embed="rId3">
               <a:extLst>
                 <a:ext uri="{28A0092B-C50C-407E-A947-70E740481C1C}">
                   <a14:useLocalDpi xmlns:a14="http://schemas.microsoft.com/office/drawing/2010/main" val="0"/>
@@ -37451,7 +37443,7 @@
           <p:nvPr/>
         </p:nvPicPr>
         <p:blipFill rotWithShape="1">
-          <a:blip r:embed="rId2" cstate="print">
+          <a:blip r:embed="rId2">
             <a:extLst>
               <a:ext uri="{28A0092B-C50C-407E-A947-70E740481C1C}">
                 <a14:useLocalDpi xmlns:a14="http://schemas.microsoft.com/office/drawing/2010/main" val="0"/>
@@ -37523,7 +37515,7 @@
           <p:nvPr/>
         </p:nvPicPr>
         <p:blipFill rotWithShape="1">
-          <a:blip r:embed="rId2" cstate="print">
+          <a:blip r:embed="rId2">
             <a:extLst>
               <a:ext uri="{28A0092B-C50C-407E-A947-70E740481C1C}">
                 <a14:useLocalDpi xmlns:a14="http://schemas.microsoft.com/office/drawing/2010/main" val="0"/>
